--- a/ppt/IndusAI10-LLM.pptx
+++ b/ppt/IndusAI10-LLM.pptx
@@ -4209,6 +4209,12 @@
           <a:p>
             <a:r>
               <a:rPr lang="fr-FR" dirty="0"/>
+              <a:t>Software as a Service</a:t>
+            </a:r>
+          </a:p>
+          <a:p>
+            <a:r>
+              <a:rPr lang="fr-FR" dirty="0"/>
               <a:t>Mode cloud</a:t>
             </a:r>
           </a:p>
@@ -4329,13 +4335,8 @@
             <a:pPr lvl="1"/>
             <a:r>
               <a:rPr lang="fr-FR" dirty="0"/>
-              <a:t>Tous sauf </a:t>
-            </a:r>
-            <a:r>
-              <a:rPr lang="fr-FR" dirty="0" err="1"/>
-              <a:t>ChatGPT</a:t>
-            </a:r>
-            <a:endParaRPr lang="fr-FR" dirty="0"/>
+              <a:t>Tous sauf les Américains</a:t>
+            </a:r>
           </a:p>
           <a:p>
             <a:r>
